--- a/苍穹外卖测试报告答辩.pptx
+++ b/苍穹外卖测试报告答辩.pptx
@@ -268,7 +268,7 @@
   <p:extLst>
     <p:ext uri="{EFAFB233-063F-42B5-8137-9DF3F51BA10A}">
       <p15:sldGuideLst xmlns:p15="http://schemas.microsoft.com/office/powerpoint/2012/main">
-        <p15:guide id="1" orient="horz" pos="2167" userDrawn="1">
+        <p15:guide id="1" orient="horz" pos="2200" userDrawn="1">
           <p15:clr>
             <a:srgbClr val="000000"/>
           </p15:clr>
@@ -13170,7 +13170,7 @@
       </p:sp>
       <p:sp>
         <p:nvSpPr>
-          <p:cNvPr id="1" name="文本框 0"/>
+          <p:cNvPr id="2" name="文本框 1"/>
           <p:cNvSpPr txBox="1"/>
           <p:nvPr/>
         </p:nvSpPr>
@@ -21920,7 +21920,7 @@
       </p:pic>
       <p:pic>
         <p:nvPicPr>
-          <p:cNvPr id="1" name="图片 0"/>
+          <p:cNvPr id="2" name="图片 1"/>
           <p:cNvPicPr>
             <a:picLocks noChangeAspect="1"/>
           </p:cNvPicPr>
@@ -24103,6 +24103,30 @@
           <a:ln>
             <a:noFill/>
           </a:ln>
+        </p:spPr>
+      </p:pic>
+      <p:pic>
+        <p:nvPicPr>
+          <p:cNvPr id="2" name="图片 1"/>
+          <p:cNvPicPr>
+            <a:picLocks noChangeAspect="1"/>
+          </p:cNvPicPr>
+          <p:nvPr/>
+        </p:nvPicPr>
+        <p:blipFill>
+          <a:blip r:embed="rId6"/>
+          <a:stretch>
+            <a:fillRect/>
+          </a:stretch>
+        </p:blipFill>
+        <p:spPr>
+          <a:xfrm>
+            <a:off x="571500" y="1266825"/>
+            <a:ext cx="10553700" cy="655320"/>
+          </a:xfrm>
+          <a:prstGeom prst="rect">
+            <a:avLst/>
+          </a:prstGeom>
         </p:spPr>
       </p:pic>
     </p:spTree>
@@ -26014,7 +26038,7 @@
       </p:sp>
       <p:pic>
         <p:nvPicPr>
-          <p:cNvPr id="1" name="图片 0"/>
+          <p:cNvPr id="2" name="图片 1"/>
           <p:cNvPicPr>
             <a:picLocks noChangeAspect="1"/>
           </p:cNvPicPr>
@@ -27347,7 +27371,7 @@
         </p:blipFill>
         <p:spPr>
           <a:xfrm>
-            <a:off x="6296025" y="2300882"/>
+            <a:off x="6286500" y="612417"/>
             <a:ext cx="5314950" cy="3027759"/>
           </a:xfrm>
           <a:prstGeom prst="rect">
@@ -27465,6 +27489,30 @@
           </a:p>
         </p:txBody>
       </p:sp>
+      <p:pic>
+        <p:nvPicPr>
+          <p:cNvPr id="3" name="Drawing 0"/>
+          <p:cNvPicPr>
+            <a:picLocks noChangeAspect="1"/>
+          </p:cNvPicPr>
+          <p:nvPr/>
+        </p:nvPicPr>
+        <p:blipFill>
+          <a:blip r:embed="rId4"/>
+          <a:stretch>
+            <a:fillRect/>
+          </a:stretch>
+        </p:blipFill>
+        <p:spPr>
+          <a:xfrm>
+            <a:off x="6286500" y="3890963"/>
+            <a:ext cx="2952750" cy="2486025"/>
+          </a:xfrm>
+          <a:prstGeom prst="rect">
+            <a:avLst/>
+          </a:prstGeom>
+        </p:spPr>
+      </p:pic>
     </p:spTree>
   </p:cSld>
   <p:clrMapOvr>
@@ -33396,7 +33444,7 @@
       </p:sp>
       <p:pic>
         <p:nvPicPr>
-          <p:cNvPr id="1" name="图片 0"/>
+          <p:cNvPr id="2" name="图片 1"/>
           <p:cNvPicPr>
             <a:picLocks noChangeAspect="1"/>
           </p:cNvPicPr>
